--- a/public/fun/pack/pptx/reviewpro/보장점검양식프리미엄_12_부부점검_누드모카.pptx
+++ b/public/fun/pack/pptx/reviewpro/보장점검양식프리미엄_12_부부점검_누드모카.pptx
@@ -112,12 +112,12 @@
   <p:extLst>
     <p:ext uri="{521415D9-36F7-43E2-AB2F-B90AF26B5E84}">
       <p14:sectionLst xmlns:p14="http://schemas.microsoft.com/office/powerpoint/2010/main">
-        <p14:section name="시작" id="{17ACF341-A58F-469F-A326-DF91923BC1FC}">
+        <p14:section name="시작" id="{E312597C-8F2F-4CE5-9B80-B9D56418AA4A}">
           <p14:sldIdLst>
             <p14:sldId id="256"/>
           </p14:sldIdLst>
         </p14:section>
-        <p14:section name="본문" id="{7F32A9AD-6728-4C82-979B-F95C4056F21B}">
+        <p14:section name="본문" id="{BF2976D0-F812-491A-9540-2E55263556CF}">
           <p14:sldIdLst>
             <p14:sldId id="257"/>
             <p14:sldId id="258"/>
@@ -1536,7 +1536,7 @@
             </a:lvl1pPr>
           </a:lstStyle>
           <a:p>
-            <a:fld id="{BA617EB3-E2FC-4605-B0BB-73757E8EC029}" type="slidenum">
+            <a:fld id="{82D74C7E-CD94-4F44-A005-A486FF15A752}" type="slidenum">
               <a:rPr lang="en-US"/>
               <a:t>‹#›</a:t>
             </a:fld>
@@ -2219,7 +2219,7 @@
             </a:lvl1pPr>
           </a:lstStyle>
           <a:p>
-            <a:fld id="{03C5555A-3D2E-48C2-9C90-5F3859532EEA}" type="slidenum">
+            <a:fld id="{95CDE03E-F350-496F-88A7-A33DAE018BC1}" type="slidenum">
               <a:rPr lang="en-US"/>
               <a:t>‹#›</a:t>
             </a:fld>
@@ -2907,7 +2907,7 @@
             </a:lvl1pPr>
           </a:lstStyle>
           <a:p>
-            <a:fld id="{29F828F1-9688-41ED-8EDD-ED581185E05E}" type="slidenum">
+            <a:fld id="{8902099A-B9A4-4FFC-B56C-1CA0EF95D525}" type="slidenum">
               <a:rPr lang="en-US"/>
               <a:t>‹#›</a:t>
             </a:fld>
@@ -3840,7 +3840,7 @@
           <a:p>
             <a:r>
               <a:rPr lang="ko-KR"/>
-              <a:t>부부 점검 · 0000. 00. 00</a:t>
+              <a:t>부부 점검 · 날짜 입력</a:t>
             </a:r>
           </a:p>
           <a:p>
@@ -3931,7 +3931,7 @@
           <a:bodyPr/>
           <a:lstStyle/>
           <a:p>
-            <a:fld id="{380BAD6C-5BDD-457E-9C20-43E0B9DA799F}" type="slidenum">
+            <a:fld id="{27D2D4AD-0673-481E-B180-88BE474B90BE}" type="slidenum">
               <a:rPr lang="en-US"/>
               <a:t>‹#›</a:t>
             </a:fld>
@@ -4644,7 +4644,7 @@
           <a:bodyPr/>
           <a:lstStyle/>
           <a:p>
-            <a:fld id="{E79BF1FE-BE9E-4BF3-81CE-4F77304D1663}" type="slidenum">
+            <a:fld id="{0E95F7AA-E77F-4F9C-AA2E-D8D1AB9F4AF1}" type="slidenum">
               <a:rPr lang="en-US"/>
               <a:t>‹#›</a:t>
             </a:fld>
@@ -6150,7 +6150,7 @@
           <a:bodyPr/>
           <a:lstStyle/>
           <a:p>
-            <a:fld id="{5CB875B3-1F52-4330-9C34-C49C7D3A50C1}" type="slidenum">
+            <a:fld id="{B3395908-683C-48FF-87E0-69B4B9C7F447}" type="slidenum">
               <a:rPr lang="en-US"/>
               <a:t>‹#›</a:t>
             </a:fld>
@@ -7700,7 +7700,7 @@
           <a:bodyPr/>
           <a:lstStyle/>
           <a:p>
-            <a:fld id="{9A8BFC80-3BD8-49CD-BC35-A457E17C629D}" type="slidenum">
+            <a:fld id="{87391ADB-453A-41D7-81DE-1AD31EE305D6}" type="slidenum">
               <a:rPr lang="en-US"/>
               <a:t>‹#›</a:t>
             </a:fld>
@@ -8571,7 +8571,7 @@
           <a:bodyPr/>
           <a:lstStyle/>
           <a:p>
-            <a:fld id="{589AA259-9FF7-4E5C-B092-1D9C852C9BBD}" type="slidenum">
+            <a:fld id="{D0170ADF-03A4-40E7-AD35-97079D45778E}" type="slidenum">
               <a:rPr lang="en-US"/>
               <a:t>‹#›</a:t>
             </a:fld>
